--- a/ゲーム科1年/00_前期/プログラミングⅠ/01_プロジェクト作成.pptx
+++ b/ゲーム科1年/00_前期/プログラミングⅠ/01_プロジェクト作成.pptx
@@ -263,7 +263,7 @@
           <a:p>
             <a:fld id="{E9CC885B-4903-4D54-9A93-00025F12DED9}" type="datetimeFigureOut">
               <a:rPr kumimoji="1" lang="ja-JP" altLang="en-US" smtClean="0"/>
-              <a:t>2024/8/27</a:t>
+              <a:t>2025/2/28</a:t>
             </a:fld>
             <a:endParaRPr kumimoji="1" lang="ja-JP" altLang="en-US"/>
           </a:p>
@@ -493,7 +493,7 @@
           <a:p>
             <a:fld id="{E9CC885B-4903-4D54-9A93-00025F12DED9}" type="datetimeFigureOut">
               <a:rPr kumimoji="1" lang="ja-JP" altLang="en-US" smtClean="0"/>
-              <a:t>2024/8/27</a:t>
+              <a:t>2025/2/28</a:t>
             </a:fld>
             <a:endParaRPr kumimoji="1" lang="ja-JP" altLang="en-US"/>
           </a:p>
@@ -733,7 +733,7 @@
           <a:p>
             <a:fld id="{E9CC885B-4903-4D54-9A93-00025F12DED9}" type="datetimeFigureOut">
               <a:rPr kumimoji="1" lang="ja-JP" altLang="en-US" smtClean="0"/>
-              <a:t>2024/8/27</a:t>
+              <a:t>2025/2/28</a:t>
             </a:fld>
             <a:endParaRPr kumimoji="1" lang="ja-JP" altLang="en-US"/>
           </a:p>
@@ -963,7 +963,7 @@
           <a:p>
             <a:fld id="{E9CC885B-4903-4D54-9A93-00025F12DED9}" type="datetimeFigureOut">
               <a:rPr kumimoji="1" lang="ja-JP" altLang="en-US" smtClean="0"/>
-              <a:t>2024/8/27</a:t>
+              <a:t>2025/2/28</a:t>
             </a:fld>
             <a:endParaRPr kumimoji="1" lang="ja-JP" altLang="en-US"/>
           </a:p>
@@ -1238,7 +1238,7 @@
           <a:p>
             <a:fld id="{E9CC885B-4903-4D54-9A93-00025F12DED9}" type="datetimeFigureOut">
               <a:rPr kumimoji="1" lang="ja-JP" altLang="en-US" smtClean="0"/>
-              <a:t>2024/8/27</a:t>
+              <a:t>2025/2/28</a:t>
             </a:fld>
             <a:endParaRPr kumimoji="1" lang="ja-JP" altLang="en-US"/>
           </a:p>
@@ -1567,7 +1567,7 @@
           <a:p>
             <a:fld id="{E9CC885B-4903-4D54-9A93-00025F12DED9}" type="datetimeFigureOut">
               <a:rPr kumimoji="1" lang="ja-JP" altLang="en-US" smtClean="0"/>
-              <a:t>2024/8/27</a:t>
+              <a:t>2025/2/28</a:t>
             </a:fld>
             <a:endParaRPr kumimoji="1" lang="ja-JP" altLang="en-US"/>
           </a:p>
@@ -2043,7 +2043,7 @@
           <a:p>
             <a:fld id="{E9CC885B-4903-4D54-9A93-00025F12DED9}" type="datetimeFigureOut">
               <a:rPr kumimoji="1" lang="ja-JP" altLang="en-US" smtClean="0"/>
-              <a:t>2024/8/27</a:t>
+              <a:t>2025/2/28</a:t>
             </a:fld>
             <a:endParaRPr kumimoji="1" lang="ja-JP" altLang="en-US"/>
           </a:p>
@@ -2184,7 +2184,7 @@
           <a:p>
             <a:fld id="{E9CC885B-4903-4D54-9A93-00025F12DED9}" type="datetimeFigureOut">
               <a:rPr kumimoji="1" lang="ja-JP" altLang="en-US" smtClean="0"/>
-              <a:t>2024/8/27</a:t>
+              <a:t>2025/2/28</a:t>
             </a:fld>
             <a:endParaRPr kumimoji="1" lang="ja-JP" altLang="en-US"/>
           </a:p>
@@ -2297,7 +2297,7 @@
           <a:p>
             <a:fld id="{E9CC885B-4903-4D54-9A93-00025F12DED9}" type="datetimeFigureOut">
               <a:rPr kumimoji="1" lang="ja-JP" altLang="en-US" smtClean="0"/>
-              <a:t>2024/8/27</a:t>
+              <a:t>2025/2/28</a:t>
             </a:fld>
             <a:endParaRPr kumimoji="1" lang="ja-JP" altLang="en-US"/>
           </a:p>
@@ -2640,7 +2640,7 @@
           <a:p>
             <a:fld id="{E9CC885B-4903-4D54-9A93-00025F12DED9}" type="datetimeFigureOut">
               <a:rPr kumimoji="1" lang="ja-JP" altLang="en-US" smtClean="0"/>
-              <a:t>2024/8/27</a:t>
+              <a:t>2025/2/28</a:t>
             </a:fld>
             <a:endParaRPr kumimoji="1" lang="ja-JP" altLang="en-US"/>
           </a:p>
@@ -2928,7 +2928,7 @@
           <a:p>
             <a:fld id="{E9CC885B-4903-4D54-9A93-00025F12DED9}" type="datetimeFigureOut">
               <a:rPr kumimoji="1" lang="ja-JP" altLang="en-US" smtClean="0"/>
-              <a:t>2024/8/27</a:t>
+              <a:t>2025/2/28</a:t>
             </a:fld>
             <a:endParaRPr kumimoji="1" lang="ja-JP" altLang="en-US"/>
           </a:p>
@@ -3201,7 +3201,7 @@
           <a:p>
             <a:fld id="{E9CC885B-4903-4D54-9A93-00025F12DED9}" type="datetimeFigureOut">
               <a:rPr kumimoji="1" lang="ja-JP" altLang="en-US" smtClean="0"/>
-              <a:t>2024/8/27</a:t>
+              <a:t>2025/2/28</a:t>
             </a:fld>
             <a:endParaRPr kumimoji="1" lang="ja-JP" altLang="en-US"/>
           </a:p>
@@ -3668,7 +3668,7 @@
         <p:spPr>
           <a:xfrm>
             <a:off x="567542" y="1189161"/>
-            <a:ext cx="9134232" cy="830997"/>
+            <a:ext cx="9244838" cy="830997"/>
           </a:xfrm>
           <a:prstGeom prst="rect">
             <a:avLst/>
@@ -3686,7 +3686,7 @@
               <a:t>プログラムによる開発は</a:t>
             </a:r>
             <a:r>
-              <a:rPr kumimoji="1" lang="en-US" altLang="ja-JP" sz="2400" dirty="0">
+              <a:rPr kumimoji="1" lang="en-US" altLang="ja-JP" sz="2400" b="1" dirty="0">
                 <a:solidFill>
                   <a:srgbClr val="FF0000"/>
                 </a:solidFill>
@@ -3836,7 +3836,7 @@
           <a:p>
             <a:r>
               <a:rPr kumimoji="1" lang="ja-JP" altLang="en-US" sz="2400" dirty="0"/>
-              <a:t>左下の検索ボックスに</a:t>
+              <a:t>中央の検索ボックスに</a:t>
             </a:r>
             <a:r>
               <a:rPr kumimoji="1" lang="en-US" altLang="ja-JP" sz="2400" dirty="0"/>
@@ -3963,7 +3963,7 @@
               <a:t>このような画面が開きますので、</a:t>
             </a:r>
             <a:r>
-              <a:rPr lang="ja-JP" altLang="en-US" sz="2400" dirty="0">
+              <a:rPr lang="ja-JP" altLang="en-US" sz="2400" b="1" dirty="0">
                 <a:solidFill>
                   <a:srgbClr val="FF0000"/>
                 </a:solidFill>
@@ -4240,7 +4240,7 @@
               <a:t>言語の授業の時は</a:t>
             </a:r>
             <a:r>
-              <a:rPr kumimoji="1" lang="ja-JP" altLang="en-US" sz="2400" dirty="0">
+              <a:rPr kumimoji="1" lang="ja-JP" altLang="en-US" sz="2400" b="1" dirty="0">
                 <a:solidFill>
                   <a:srgbClr val="FF0000"/>
                 </a:solidFill>
@@ -4374,7 +4374,7 @@
           <a:lstStyle/>
           <a:p>
             <a:r>
-              <a:rPr kumimoji="1" lang="en-US" altLang="ja-JP" sz="2400" dirty="0">
+              <a:rPr kumimoji="1" lang="en-US" altLang="ja-JP" sz="2400" b="1" dirty="0">
                 <a:solidFill>
                   <a:srgbClr val="FF0000"/>
                 </a:solidFill>
@@ -4382,14 +4382,14 @@
               <a:t>※</a:t>
             </a:r>
             <a:r>
-              <a:rPr kumimoji="1" lang="ja-JP" altLang="en-US" sz="2400" dirty="0">
+              <a:rPr kumimoji="1" lang="ja-JP" altLang="en-US" sz="2400" b="1" dirty="0">
                 <a:solidFill>
                   <a:srgbClr val="FF0000"/>
                 </a:solidFill>
               </a:rPr>
               <a:t>ゲーム制作の場合はまた違うものになります！！</a:t>
             </a:r>
-            <a:endParaRPr kumimoji="1" lang="en-US" altLang="ja-JP" sz="2400" dirty="0">
+            <a:endParaRPr kumimoji="1" lang="en-US" altLang="ja-JP" sz="2400" b="1" dirty="0">
               <a:solidFill>
                 <a:srgbClr val="FF0000"/>
               </a:solidFill>

--- a/ゲーム科1年/00_前期/プログラミングⅠ/01_プロジェクト作成.pptx
+++ b/ゲーム科1年/00_前期/プログラミングⅠ/01_プロジェクト作成.pptx
@@ -8,8 +8,9 @@
     <p:sldId id="256" r:id="rId2"/>
     <p:sldId id="257" r:id="rId3"/>
     <p:sldId id="258" r:id="rId4"/>
-    <p:sldId id="259" r:id="rId5"/>
-    <p:sldId id="260" r:id="rId6"/>
+    <p:sldId id="261" r:id="rId5"/>
+    <p:sldId id="259" r:id="rId6"/>
+    <p:sldId id="260" r:id="rId7"/>
   </p:sldIdLst>
   <p:sldSz cx="12192000" cy="6858000"/>
   <p:notesSz cx="6858000" cy="9144000"/>
@@ -263,7 +264,7 @@
           <a:p>
             <a:fld id="{E9CC885B-4903-4D54-9A93-00025F12DED9}" type="datetimeFigureOut">
               <a:rPr kumimoji="1" lang="ja-JP" altLang="en-US" smtClean="0"/>
-              <a:t>2025/2/28</a:t>
+              <a:t>2025/4/9</a:t>
             </a:fld>
             <a:endParaRPr kumimoji="1" lang="ja-JP" altLang="en-US"/>
           </a:p>
@@ -493,7 +494,7 @@
           <a:p>
             <a:fld id="{E9CC885B-4903-4D54-9A93-00025F12DED9}" type="datetimeFigureOut">
               <a:rPr kumimoji="1" lang="ja-JP" altLang="en-US" smtClean="0"/>
-              <a:t>2025/2/28</a:t>
+              <a:t>2025/4/9</a:t>
             </a:fld>
             <a:endParaRPr kumimoji="1" lang="ja-JP" altLang="en-US"/>
           </a:p>
@@ -733,7 +734,7 @@
           <a:p>
             <a:fld id="{E9CC885B-4903-4D54-9A93-00025F12DED9}" type="datetimeFigureOut">
               <a:rPr kumimoji="1" lang="ja-JP" altLang="en-US" smtClean="0"/>
-              <a:t>2025/2/28</a:t>
+              <a:t>2025/4/9</a:t>
             </a:fld>
             <a:endParaRPr kumimoji="1" lang="ja-JP" altLang="en-US"/>
           </a:p>
@@ -963,7 +964,7 @@
           <a:p>
             <a:fld id="{E9CC885B-4903-4D54-9A93-00025F12DED9}" type="datetimeFigureOut">
               <a:rPr kumimoji="1" lang="ja-JP" altLang="en-US" smtClean="0"/>
-              <a:t>2025/2/28</a:t>
+              <a:t>2025/4/9</a:t>
             </a:fld>
             <a:endParaRPr kumimoji="1" lang="ja-JP" altLang="en-US"/>
           </a:p>
@@ -1238,7 +1239,7 @@
           <a:p>
             <a:fld id="{E9CC885B-4903-4D54-9A93-00025F12DED9}" type="datetimeFigureOut">
               <a:rPr kumimoji="1" lang="ja-JP" altLang="en-US" smtClean="0"/>
-              <a:t>2025/2/28</a:t>
+              <a:t>2025/4/9</a:t>
             </a:fld>
             <a:endParaRPr kumimoji="1" lang="ja-JP" altLang="en-US"/>
           </a:p>
@@ -1567,7 +1568,7 @@
           <a:p>
             <a:fld id="{E9CC885B-4903-4D54-9A93-00025F12DED9}" type="datetimeFigureOut">
               <a:rPr kumimoji="1" lang="ja-JP" altLang="en-US" smtClean="0"/>
-              <a:t>2025/2/28</a:t>
+              <a:t>2025/4/9</a:t>
             </a:fld>
             <a:endParaRPr kumimoji="1" lang="ja-JP" altLang="en-US"/>
           </a:p>
@@ -2043,7 +2044,7 @@
           <a:p>
             <a:fld id="{E9CC885B-4903-4D54-9A93-00025F12DED9}" type="datetimeFigureOut">
               <a:rPr kumimoji="1" lang="ja-JP" altLang="en-US" smtClean="0"/>
-              <a:t>2025/2/28</a:t>
+              <a:t>2025/4/9</a:t>
             </a:fld>
             <a:endParaRPr kumimoji="1" lang="ja-JP" altLang="en-US"/>
           </a:p>
@@ -2184,7 +2185,7 @@
           <a:p>
             <a:fld id="{E9CC885B-4903-4D54-9A93-00025F12DED9}" type="datetimeFigureOut">
               <a:rPr kumimoji="1" lang="ja-JP" altLang="en-US" smtClean="0"/>
-              <a:t>2025/2/28</a:t>
+              <a:t>2025/4/9</a:t>
             </a:fld>
             <a:endParaRPr kumimoji="1" lang="ja-JP" altLang="en-US"/>
           </a:p>
@@ -2297,7 +2298,7 @@
           <a:p>
             <a:fld id="{E9CC885B-4903-4D54-9A93-00025F12DED9}" type="datetimeFigureOut">
               <a:rPr kumimoji="1" lang="ja-JP" altLang="en-US" smtClean="0"/>
-              <a:t>2025/2/28</a:t>
+              <a:t>2025/4/9</a:t>
             </a:fld>
             <a:endParaRPr kumimoji="1" lang="ja-JP" altLang="en-US"/>
           </a:p>
@@ -2640,7 +2641,7 @@
           <a:p>
             <a:fld id="{E9CC885B-4903-4D54-9A93-00025F12DED9}" type="datetimeFigureOut">
               <a:rPr kumimoji="1" lang="ja-JP" altLang="en-US" smtClean="0"/>
-              <a:t>2025/2/28</a:t>
+              <a:t>2025/4/9</a:t>
             </a:fld>
             <a:endParaRPr kumimoji="1" lang="ja-JP" altLang="en-US"/>
           </a:p>
@@ -2928,7 +2929,7 @@
           <a:p>
             <a:fld id="{E9CC885B-4903-4D54-9A93-00025F12DED9}" type="datetimeFigureOut">
               <a:rPr kumimoji="1" lang="ja-JP" altLang="en-US" smtClean="0"/>
-              <a:t>2025/2/28</a:t>
+              <a:t>2025/4/9</a:t>
             </a:fld>
             <a:endParaRPr kumimoji="1" lang="ja-JP" altLang="en-US"/>
           </a:p>
@@ -3201,7 +3202,7 @@
           <a:p>
             <a:fld id="{E9CC885B-4903-4D54-9A93-00025F12DED9}" type="datetimeFigureOut">
               <a:rPr kumimoji="1" lang="ja-JP" altLang="en-US" smtClean="0"/>
-              <a:t>2025/2/28</a:t>
+              <a:t>2025/4/9</a:t>
             </a:fld>
             <a:endParaRPr kumimoji="1" lang="ja-JP" altLang="en-US"/>
           </a:p>
@@ -4477,6 +4478,295 @@
         <p:spPr>
           <a:xfrm>
             <a:off x="567542" y="1189161"/>
+            <a:ext cx="10649069" cy="461665"/>
+          </a:xfrm>
+          <a:prstGeom prst="rect">
+            <a:avLst/>
+          </a:prstGeom>
+          <a:noFill/>
+        </p:spPr>
+        <p:txBody>
+          <a:bodyPr wrap="none" rtlCol="0">
+            <a:spAutoFit/>
+          </a:bodyPr>
+          <a:lstStyle/>
+          <a:p>
+            <a:r>
+              <a:rPr kumimoji="1" lang="ja-JP" altLang="en-US" sz="2400" dirty="0"/>
+              <a:t>プロジェクト名と保存場所とチェックボックスを設定して作成しましょう。</a:t>
+            </a:r>
+            <a:endParaRPr kumimoji="1" lang="en-US" altLang="ja-JP" sz="2400" dirty="0"/>
+          </a:p>
+        </p:txBody>
+      </p:sp>
+      <p:sp>
+        <p:nvSpPr>
+          <p:cNvPr id="12" name="テキスト ボックス 11">
+            <a:extLst>
+              <a:ext uri="{FF2B5EF4-FFF2-40B4-BE49-F238E27FC236}">
+                <a16:creationId xmlns:a16="http://schemas.microsoft.com/office/drawing/2014/main" id="{5BF13FDB-FDF6-40B9-AE11-1DE27D81F86C}"/>
+              </a:ext>
+            </a:extLst>
+          </p:cNvPr>
+          <p:cNvSpPr txBox="1"/>
+          <p:nvPr/>
+        </p:nvSpPr>
+        <p:spPr>
+          <a:xfrm>
+            <a:off x="567542" y="5668839"/>
+            <a:ext cx="6647974" cy="461665"/>
+          </a:xfrm>
+          <a:prstGeom prst="rect">
+            <a:avLst/>
+          </a:prstGeom>
+          <a:noFill/>
+        </p:spPr>
+        <p:txBody>
+          <a:bodyPr wrap="none" rtlCol="0">
+            <a:spAutoFit/>
+          </a:bodyPr>
+          <a:lstStyle/>
+          <a:p>
+            <a:r>
+              <a:rPr kumimoji="1" lang="en-US" altLang="ja-JP" sz="2400" b="1" dirty="0">
+                <a:solidFill>
+                  <a:srgbClr val="FF0000"/>
+                </a:solidFill>
+              </a:rPr>
+              <a:t>※</a:t>
+            </a:r>
+            <a:r>
+              <a:rPr kumimoji="1" lang="ja-JP" altLang="en-US" sz="2400" b="1" dirty="0">
+                <a:solidFill>
+                  <a:srgbClr val="FF0000"/>
+                </a:solidFill>
+              </a:rPr>
+              <a:t>必ず自分のわかる場所に保存しましょう！！</a:t>
+            </a:r>
+            <a:endParaRPr kumimoji="1" lang="en-US" altLang="ja-JP" sz="2400" b="1" dirty="0">
+              <a:solidFill>
+                <a:srgbClr val="FF0000"/>
+              </a:solidFill>
+            </a:endParaRPr>
+          </a:p>
+        </p:txBody>
+      </p:sp>
+      <p:pic>
+        <p:nvPicPr>
+          <p:cNvPr id="5" name="図 4">
+            <a:extLst>
+              <a:ext uri="{FF2B5EF4-FFF2-40B4-BE49-F238E27FC236}">
+                <a16:creationId xmlns:a16="http://schemas.microsoft.com/office/drawing/2014/main" id="{1817086F-2FBE-487B-8946-AEE94B63E7E1}"/>
+              </a:ext>
+            </a:extLst>
+          </p:cNvPr>
+          <p:cNvPicPr>
+            <a:picLocks noChangeAspect="1"/>
+          </p:cNvPicPr>
+          <p:nvPr/>
+        </p:nvPicPr>
+        <p:blipFill>
+          <a:blip r:embed="rId2"/>
+          <a:stretch>
+            <a:fillRect/>
+          </a:stretch>
+        </p:blipFill>
+        <p:spPr>
+          <a:xfrm>
+            <a:off x="567542" y="1763258"/>
+            <a:ext cx="5654582" cy="3733511"/>
+          </a:xfrm>
+          <a:prstGeom prst="rect">
+            <a:avLst/>
+          </a:prstGeom>
+        </p:spPr>
+      </p:pic>
+      <p:sp>
+        <p:nvSpPr>
+          <p:cNvPr id="7" name="正方形/長方形 6">
+            <a:extLst>
+              <a:ext uri="{FF2B5EF4-FFF2-40B4-BE49-F238E27FC236}">
+                <a16:creationId xmlns:a16="http://schemas.microsoft.com/office/drawing/2014/main" id="{9848097C-6BB8-437C-8CA1-BD15CC70B42E}"/>
+              </a:ext>
+            </a:extLst>
+          </p:cNvPr>
+          <p:cNvSpPr/>
+          <p:nvPr/>
+        </p:nvSpPr>
+        <p:spPr>
+          <a:xfrm>
+            <a:off x="567542" y="2370667"/>
+            <a:ext cx="3792791" cy="804333"/>
+          </a:xfrm>
+          <a:prstGeom prst="rect">
+            <a:avLst/>
+          </a:prstGeom>
+          <a:noFill/>
+          <a:ln w="38100">
+            <a:solidFill>
+              <a:srgbClr val="FF0000"/>
+            </a:solidFill>
+          </a:ln>
+        </p:spPr>
+        <p:style>
+          <a:lnRef idx="2">
+            <a:schemeClr val="accent1">
+              <a:shade val="50000"/>
+            </a:schemeClr>
+          </a:lnRef>
+          <a:fillRef idx="1">
+            <a:schemeClr val="accent1"/>
+          </a:fillRef>
+          <a:effectRef idx="0">
+            <a:schemeClr val="accent1"/>
+          </a:effectRef>
+          <a:fontRef idx="minor">
+            <a:schemeClr val="lt1"/>
+          </a:fontRef>
+        </p:style>
+        <p:txBody>
+          <a:bodyPr rtlCol="0" anchor="ctr"/>
+          <a:lstStyle/>
+          <a:p>
+            <a:pPr algn="ctr"/>
+            <a:endParaRPr kumimoji="1" lang="ja-JP" altLang="en-US"/>
+          </a:p>
+        </p:txBody>
+      </p:sp>
+      <p:sp>
+        <p:nvSpPr>
+          <p:cNvPr id="8" name="矢印: 下 7">
+            <a:extLst>
+              <a:ext uri="{FF2B5EF4-FFF2-40B4-BE49-F238E27FC236}">
+                <a16:creationId xmlns:a16="http://schemas.microsoft.com/office/drawing/2014/main" id="{5B00A26E-64C2-4855-86DC-D003FBB97127}"/>
+              </a:ext>
+            </a:extLst>
+          </p:cNvPr>
+          <p:cNvSpPr/>
+          <p:nvPr/>
+        </p:nvSpPr>
+        <p:spPr>
+          <a:xfrm rot="8053911">
+            <a:off x="745435" y="3592897"/>
+            <a:ext cx="448734" cy="685951"/>
+          </a:xfrm>
+          <a:prstGeom prst="downArrow">
+            <a:avLst/>
+          </a:prstGeom>
+          <a:solidFill>
+            <a:srgbClr val="FF0000"/>
+          </a:solidFill>
+          <a:ln>
+            <a:solidFill>
+              <a:schemeClr val="tx1"/>
+            </a:solidFill>
+          </a:ln>
+        </p:spPr>
+        <p:style>
+          <a:lnRef idx="2">
+            <a:schemeClr val="accent1">
+              <a:shade val="50000"/>
+            </a:schemeClr>
+          </a:lnRef>
+          <a:fillRef idx="1">
+            <a:schemeClr val="accent1"/>
+          </a:fillRef>
+          <a:effectRef idx="0">
+            <a:schemeClr val="accent1"/>
+          </a:effectRef>
+          <a:fontRef idx="minor">
+            <a:schemeClr val="lt1"/>
+          </a:fontRef>
+        </p:style>
+        <p:txBody>
+          <a:bodyPr rtlCol="0" anchor="ctr"/>
+          <a:lstStyle/>
+          <a:p>
+            <a:pPr algn="ctr"/>
+            <a:endParaRPr kumimoji="1" lang="ja-JP" altLang="en-US"/>
+          </a:p>
+        </p:txBody>
+      </p:sp>
+    </p:spTree>
+    <p:extLst>
+      <p:ext uri="{BB962C8B-B14F-4D97-AF65-F5344CB8AC3E}">
+        <p14:creationId xmlns:p14="http://schemas.microsoft.com/office/powerpoint/2010/main" val="2910788738"/>
+      </p:ext>
+    </p:extLst>
+  </p:cSld>
+  <p:clrMapOvr>
+    <a:masterClrMapping/>
+  </p:clrMapOvr>
+</p:sld>
+</file>
+
+<file path=ppt/slides/slide5.xml><?xml version="1.0" encoding="utf-8"?>
+<p:sld xmlns:a="http://schemas.openxmlformats.org/drawingml/2006/main" xmlns:r="http://schemas.openxmlformats.org/officeDocument/2006/relationships" xmlns:p="http://schemas.openxmlformats.org/presentationml/2006/main">
+  <p:cSld>
+    <p:spTree>
+      <p:nvGrpSpPr>
+        <p:cNvPr id="1" name=""/>
+        <p:cNvGrpSpPr/>
+        <p:nvPr/>
+      </p:nvGrpSpPr>
+      <p:grpSpPr>
+        <a:xfrm>
+          <a:off x="0" y="0"/>
+          <a:ext cx="0" cy="0"/>
+          <a:chOff x="0" y="0"/>
+          <a:chExt cx="0" cy="0"/>
+        </a:xfrm>
+      </p:grpSpPr>
+      <p:sp>
+        <p:nvSpPr>
+          <p:cNvPr id="4" name="テキスト ボックス 3">
+            <a:extLst>
+              <a:ext uri="{FF2B5EF4-FFF2-40B4-BE49-F238E27FC236}">
+                <a16:creationId xmlns:a16="http://schemas.microsoft.com/office/drawing/2014/main" id="{5A13BF46-B8C5-48AA-8308-C9ECFF431A18}"/>
+              </a:ext>
+            </a:extLst>
+          </p:cNvPr>
+          <p:cNvSpPr txBox="1"/>
+          <p:nvPr/>
+        </p:nvSpPr>
+        <p:spPr>
+          <a:xfrm>
+            <a:off x="567542" y="491954"/>
+            <a:ext cx="3877985" cy="584775"/>
+          </a:xfrm>
+          <a:prstGeom prst="rect">
+            <a:avLst/>
+          </a:prstGeom>
+          <a:noFill/>
+        </p:spPr>
+        <p:txBody>
+          <a:bodyPr wrap="none" rtlCol="0">
+            <a:spAutoFit/>
+          </a:bodyPr>
+          <a:lstStyle/>
+          <a:p>
+            <a:r>
+              <a:rPr kumimoji="1" lang="ja-JP" altLang="en-US" sz="3200" b="1" u="sng" dirty="0"/>
+              <a:t>プロジェクトの作成</a:t>
+            </a:r>
+          </a:p>
+        </p:txBody>
+      </p:sp>
+      <p:sp>
+        <p:nvSpPr>
+          <p:cNvPr id="6" name="テキスト ボックス 5">
+            <a:extLst>
+              <a:ext uri="{FF2B5EF4-FFF2-40B4-BE49-F238E27FC236}">
+                <a16:creationId xmlns:a16="http://schemas.microsoft.com/office/drawing/2014/main" id="{55830AD6-028B-4C4E-80BF-B70DFC1C3A46}"/>
+              </a:ext>
+            </a:extLst>
+          </p:cNvPr>
+          <p:cNvSpPr txBox="1"/>
+          <p:nvPr/>
+        </p:nvSpPr>
+        <p:spPr>
+          <a:xfrm>
+            <a:off x="567542" y="1189161"/>
             <a:ext cx="4801314" cy="461665"/>
           </a:xfrm>
           <a:prstGeom prst="rect">
@@ -4547,7 +4837,7 @@
 </p:sld>
 </file>
 
-<file path=ppt/slides/slide5.xml><?xml version="1.0" encoding="utf-8"?>
+<file path=ppt/slides/slide6.xml><?xml version="1.0" encoding="utf-8"?>
 <p:sld xmlns:a="http://schemas.openxmlformats.org/drawingml/2006/main" xmlns:r="http://schemas.openxmlformats.org/officeDocument/2006/relationships" xmlns:p="http://schemas.openxmlformats.org/presentationml/2006/main">
   <p:cSld>
     <p:spTree>
